--- a/media/resources/files/Onduktar_Kaytalanuuchu_iReettoo-KartaSortto_Gid1vZ5.pptx
+++ b/media/resources/files/Onduktar_Kaytalanuuchu_iReettoo-KartaSortto_Gid1vZ5.pptx
@@ -17872,7 +17872,7 @@
                 <a:ea typeface="+mn-ea"/>
                 <a:cs typeface="+mn-cs"/>
               </a:rPr>
-              <a:t>Турдуу пикирлер учун ыраазычылык билдиребиз.</a:t>
+              <a:t>Түрдүү пикирлер үчүн ыраазычылык билдиребиз.</a:t>
             </a:r>
           </a:p>
           <a:p>

--- a/media/resources/files/Onduktar_Kaytalanuuchu_iReettoo-KartaSortto_Gid1vZ5.pptx
+++ b/media/resources/files/Onduktar_Kaytalanuuchu_iReettoo-KartaSortto_Gid1vZ5.pptx
@@ -3308,7 +3308,7 @@
           <a:p>
             <a:r>
               <a:rPr lang="en-GB" sz="4000" dirty="0"/>
-              <a:t>0.43</a:t>
+              <a:t>0,43</a:t>
             </a:r>
           </a:p>
         </p:txBody>
@@ -3399,7 +3399,7 @@
           <a:p>
             <a:r>
               <a:rPr lang="en-GB" sz="4000" dirty="0"/>
-              <a:t>0.462</a:t>
+              <a:t>0,462</a:t>
             </a:r>
           </a:p>
         </p:txBody>
@@ -3490,7 +3490,7 @@
           <a:p>
             <a:r>
               <a:rPr lang="en-GB" sz="4000" dirty="0"/>
-              <a:t>0.46</a:t>
+              <a:t>0,46</a:t>
             </a:r>
           </a:p>
         </p:txBody>
@@ -3581,7 +3581,7 @@
           <a:p>
             <a:r>
               <a:rPr lang="en-GB" sz="4000" dirty="0"/>
-              <a:t>0.43</a:t>
+              <a:t>0,43</a:t>
             </a:r>
           </a:p>
         </p:txBody>
@@ -3672,7 +3672,7 @@
           <a:p>
             <a:r>
               <a:rPr lang="en-GB" sz="4000" dirty="0"/>
-              <a:t>0.48</a:t>
+              <a:t>0,48</a:t>
             </a:r>
           </a:p>
         </p:txBody>
@@ -3763,7 +3763,7 @@
           <a:p>
             <a:r>
               <a:rPr lang="en-GB" sz="4000" dirty="0"/>
-              <a:t>0.48</a:t>
+              <a:t>0,48</a:t>
             </a:r>
             <a:endParaRPr lang="en-GB" sz="4000" dirty="0">
               <a:solidFill>
@@ -3859,7 +3859,7 @@
           <a:p>
             <a:r>
               <a:rPr lang="en-GB" sz="4000" dirty="0"/>
-              <a:t>0.488</a:t>
+              <a:t>0,488</a:t>
             </a:r>
           </a:p>
         </p:txBody>
@@ -3950,7 +3950,7 @@
           <a:p>
             <a:r>
               <a:rPr lang="en-GB" sz="4000" dirty="0"/>
-              <a:t>0.434</a:t>
+              <a:t>0,434</a:t>
             </a:r>
           </a:p>
         </p:txBody>
@@ -4041,7 +4041,7 @@
           <a:p>
             <a:r>
               <a:rPr lang="en-GB" sz="4000" dirty="0"/>
-              <a:t>0.433</a:t>
+              <a:t>0,433</a:t>
             </a:r>
           </a:p>
         </p:txBody>
@@ -4132,7 +4132,7 @@
           <a:p>
             <a:r>
               <a:rPr lang="en-GB" sz="4000" dirty="0"/>
-              <a:t>0.40</a:t>
+              <a:t>0,40</a:t>
             </a:r>
           </a:p>
         </p:txBody>
@@ -4223,7 +4223,7 @@
           <a:p>
             <a:r>
               <a:rPr lang="en-GB" sz="4000" dirty="0"/>
-              <a:t>0.443</a:t>
+              <a:t>0,443</a:t>
             </a:r>
           </a:p>
         </p:txBody>
@@ -4314,7 +4314,7 @@
           <a:p>
             <a:r>
               <a:rPr lang="en-GB" sz="4000" dirty="0"/>
-              <a:t>0.403</a:t>
+              <a:t>0,403</a:t>
             </a:r>
           </a:p>
         </p:txBody>
@@ -4405,7 +4405,7 @@
           <a:p>
             <a:r>
               <a:rPr lang="en-GB" sz="4000" dirty="0"/>
-              <a:t>0.46</a:t>
+              <a:t>0,46</a:t>
             </a:r>
           </a:p>
         </p:txBody>
@@ -4496,7 +4496,7 @@
           <a:p>
             <a:r>
               <a:rPr lang="en-GB" sz="4000" dirty="0"/>
-              <a:t>0.426</a:t>
+              <a:t>0,426</a:t>
             </a:r>
           </a:p>
         </p:txBody>
@@ -4587,7 +4587,7 @@
           <a:p>
             <a:r>
               <a:rPr lang="en-GB" sz="4000" dirty="0"/>
-              <a:t>0.404</a:t>
+              <a:t>0,404</a:t>
             </a:r>
           </a:p>
         </p:txBody>
@@ -5350,7 +5350,7 @@
           <a:p>
             <a:r>
               <a:rPr lang="en-GB" sz="4000" dirty="0"/>
-              <a:t>0.4</a:t>
+              <a:t>0,4</a:t>
             </a:r>
           </a:p>
         </p:txBody>
@@ -7135,7 +7135,7 @@
           <a:p>
             <a:r>
               <a:rPr lang="en-GB" sz="4000" dirty="0"/>
-              <a:t>0.43</a:t>
+              <a:t>0,43</a:t>
             </a:r>
             <a:r>
               <a:rPr lang="ky-KG" sz="4000" dirty="0">
@@ -7239,7 +7239,7 @@
           <a:p>
             <a:r>
               <a:rPr lang="en-GB" sz="4000" dirty="0"/>
-              <a:t>0.462</a:t>
+              <a:t>0,462</a:t>
             </a:r>
             <a:r>
               <a:rPr lang="ky-KG" sz="4000" dirty="0">
@@ -7343,7 +7343,7 @@
           <a:p>
             <a:r>
               <a:rPr lang="en-GB" sz="4000" dirty="0"/>
-              <a:t>0.46</a:t>
+              <a:t>0,46</a:t>
             </a:r>
             <a:r>
               <a:rPr lang="ky-KG" sz="4000" dirty="0">
@@ -7447,7 +7447,7 @@
           <a:p>
             <a:r>
               <a:rPr lang="en-GB" sz="4000" dirty="0"/>
-              <a:t>0.43</a:t>
+              <a:t>0,43</a:t>
             </a:r>
             <a:r>
               <a:rPr lang="ky-KG" sz="4000" dirty="0">
@@ -7551,7 +7551,7 @@
           <a:p>
             <a:r>
               <a:rPr lang="en-GB" sz="4000" dirty="0"/>
-              <a:t>0.48</a:t>
+              <a:t>0,48</a:t>
             </a:r>
             <a:r>
               <a:rPr lang="ky-KG" sz="4000" dirty="0">
@@ -7655,7 +7655,7 @@
           <a:p>
             <a:r>
               <a:rPr lang="en-GB" sz="4000" dirty="0"/>
-              <a:t>0.48</a:t>
+              <a:t>0,48</a:t>
             </a:r>
             <a:r>
               <a:rPr lang="ky-KG" sz="4000" dirty="0">
@@ -7759,7 +7759,7 @@
           <a:p>
             <a:r>
               <a:rPr lang="en-GB" sz="4000" dirty="0"/>
-              <a:t>0.488</a:t>
+              <a:t>0,488</a:t>
             </a:r>
             <a:r>
               <a:rPr lang="ky-KG" sz="4000" dirty="0">
@@ -7863,7 +7863,7 @@
           <a:p>
             <a:r>
               <a:rPr lang="en-GB" sz="4000" dirty="0"/>
-              <a:t>0.434</a:t>
+              <a:t>0,434</a:t>
             </a:r>
             <a:r>
               <a:rPr lang="ky-KG" sz="4000" dirty="0">
@@ -7967,7 +7967,7 @@
           <a:p>
             <a:r>
               <a:rPr lang="en-GB" sz="4000" dirty="0"/>
-              <a:t>0.433</a:t>
+              <a:t>0,433</a:t>
             </a:r>
             <a:r>
               <a:rPr lang="ky-KG" sz="4000" dirty="0">
@@ -8071,7 +8071,7 @@
           <a:p>
             <a:r>
               <a:rPr lang="en-GB" sz="4000" dirty="0"/>
-              <a:t>0.40</a:t>
+              <a:t>0,40</a:t>
             </a:r>
             <a:r>
               <a:rPr lang="ky-KG" sz="4000" dirty="0">
@@ -8175,7 +8175,7 @@
           <a:p>
             <a:r>
               <a:rPr lang="en-GB" sz="4000" dirty="0"/>
-              <a:t>0.443</a:t>
+              <a:t>0,443</a:t>
             </a:r>
             <a:r>
               <a:rPr lang="ky-KG" sz="4000" dirty="0">
@@ -8279,7 +8279,7 @@
           <a:p>
             <a:r>
               <a:rPr lang="en-GB" sz="4000" dirty="0"/>
-              <a:t>0.403</a:t>
+              <a:t>0,403</a:t>
             </a:r>
             <a:r>
               <a:rPr lang="ky-KG" sz="4000" dirty="0">
@@ -8383,7 +8383,7 @@
           <a:p>
             <a:r>
               <a:rPr lang="en-GB" sz="4000" dirty="0"/>
-              <a:t>0.46</a:t>
+              <a:t>0,46</a:t>
             </a:r>
             <a:r>
               <a:rPr lang="ky-KG" sz="4000" dirty="0">
@@ -8487,7 +8487,7 @@
           <a:p>
             <a:r>
               <a:rPr lang="en-GB" sz="4000" dirty="0"/>
-              <a:t>0.426</a:t>
+              <a:t>0,426</a:t>
             </a:r>
             <a:r>
               <a:rPr lang="ky-KG" sz="4000" dirty="0">
@@ -8591,7 +8591,7 @@
           <a:p>
             <a:r>
               <a:rPr lang="en-GB" sz="4000" dirty="0"/>
-              <a:t>0.404</a:t>
+              <a:t>0,404</a:t>
             </a:r>
             <a:r>
               <a:rPr lang="ky-KG" sz="4000" dirty="0">
@@ -9367,7 +9367,7 @@
           <a:p>
             <a:r>
               <a:rPr lang="en-GB" sz="4000" dirty="0"/>
-              <a:t>0.4</a:t>
+              <a:t>0,4</a:t>
             </a:r>
             <a:r>
               <a:rPr lang="ky-KG" sz="4000" dirty="0">
@@ -10055,7 +10055,7 @@
           <a:p>
             <a:r>
               <a:rPr lang="en-GB" sz="4000" dirty="0"/>
-              <a:t>0.43</a:t>
+              <a:t>0,43</a:t>
             </a:r>
             <a:r>
               <a:rPr lang="en-GB" sz="4000" dirty="0">
@@ -10155,7 +10155,7 @@
           <a:p>
             <a:r>
               <a:rPr lang="en-GB" sz="4000" dirty="0"/>
-              <a:t>0.462</a:t>
+              <a:t>0,462</a:t>
             </a:r>
             <a:r>
               <a:rPr lang="en-GB" sz="4000" dirty="0">
@@ -10255,7 +10255,7 @@
           <a:p>
             <a:r>
               <a:rPr lang="en-GB" sz="4000" dirty="0"/>
-              <a:t>0.48</a:t>
+              <a:t>0,48</a:t>
             </a:r>
             <a:r>
               <a:rPr lang="en-GB" sz="4000" dirty="0">
@@ -10355,7 +10355,7 @@
           <a:p>
             <a:r>
               <a:rPr lang="en-GB" sz="4000" dirty="0"/>
-              <a:t>0.48</a:t>
+              <a:t>0,48</a:t>
             </a:r>
             <a:r>
               <a:rPr lang="en-GB" sz="4000" dirty="0">
@@ -10454,7 +10454,7 @@
           <a:p>
             <a:r>
               <a:rPr lang="en-GB" sz="4000" dirty="0"/>
-              <a:t>0.488</a:t>
+              <a:t>0,488</a:t>
             </a:r>
             <a:r>
               <a:rPr lang="en-GB" sz="4000" dirty="0">
@@ -10554,7 +10554,7 @@
           <a:p>
             <a:r>
               <a:rPr lang="en-GB" sz="4000" dirty="0"/>
-              <a:t>0.433</a:t>
+              <a:t>0,433</a:t>
             </a:r>
             <a:r>
               <a:rPr lang="en-GB" sz="4000" dirty="0">
@@ -10654,7 +10654,7 @@
           <a:p>
             <a:r>
               <a:rPr lang="en-GB" sz="4000" dirty="0"/>
-              <a:t>0.404</a:t>
+              <a:t>0,404</a:t>
             </a:r>
             <a:r>
               <a:rPr lang="en-GB" sz="4000" dirty="0">
@@ -11090,7 +11090,7 @@
           <a:p>
             <a:r>
               <a:rPr lang="en-GB" sz="4000" dirty="0"/>
-              <a:t>0.4</a:t>
+              <a:t>0,4</a:t>
             </a:r>
             <a:r>
               <a:rPr lang="en-GB" sz="4000" dirty="0">
@@ -15230,7 +15230,7 @@
           <a:p>
             <a:r>
               <a:rPr lang="en-GB" sz="4000" dirty="0"/>
-              <a:t>0.43</a:t>
+              <a:t>0,43</a:t>
             </a:r>
           </a:p>
         </p:txBody>
@@ -15321,7 +15321,7 @@
           <a:p>
             <a:r>
               <a:rPr lang="en-GB" sz="4000" dirty="0"/>
-              <a:t>0.462</a:t>
+              <a:t>0,462</a:t>
             </a:r>
           </a:p>
         </p:txBody>
@@ -15412,7 +15412,7 @@
           <a:p>
             <a:r>
               <a:rPr lang="en-GB" sz="4000" dirty="0"/>
-              <a:t>0.46</a:t>
+              <a:t>0,46</a:t>
             </a:r>
           </a:p>
         </p:txBody>
@@ -15503,7 +15503,7 @@
           <a:p>
             <a:r>
               <a:rPr lang="en-GB" sz="4000" dirty="0"/>
-              <a:t>0.43</a:t>
+              <a:t>0,43</a:t>
             </a:r>
           </a:p>
         </p:txBody>
@@ -15594,7 +15594,7 @@
           <a:p>
             <a:r>
               <a:rPr lang="en-GB" sz="4000" dirty="0"/>
-              <a:t>0.48</a:t>
+              <a:t>0,48</a:t>
             </a:r>
           </a:p>
         </p:txBody>
@@ -15685,7 +15685,7 @@
           <a:p>
             <a:r>
               <a:rPr lang="en-GB" sz="4000" dirty="0"/>
-              <a:t>0.48</a:t>
+              <a:t>0,48</a:t>
             </a:r>
             <a:endParaRPr lang="en-GB" sz="4000" dirty="0">
               <a:solidFill>
@@ -15781,7 +15781,7 @@
           <a:p>
             <a:r>
               <a:rPr lang="en-GB" sz="4000" dirty="0"/>
-              <a:t>0.488</a:t>
+              <a:t>0,488</a:t>
             </a:r>
           </a:p>
         </p:txBody>
@@ -15872,7 +15872,7 @@
           <a:p>
             <a:r>
               <a:rPr lang="en-GB" sz="4000" dirty="0"/>
-              <a:t>0.434</a:t>
+              <a:t>0,434</a:t>
             </a:r>
           </a:p>
         </p:txBody>
@@ -15963,7 +15963,7 @@
           <a:p>
             <a:r>
               <a:rPr lang="en-GB" sz="4000" dirty="0"/>
-              <a:t>0.433</a:t>
+              <a:t>0,433</a:t>
             </a:r>
           </a:p>
         </p:txBody>
@@ -16054,7 +16054,7 @@
           <a:p>
             <a:r>
               <a:rPr lang="en-GB" sz="4000" dirty="0"/>
-              <a:t>0.40</a:t>
+              <a:t>0,40</a:t>
             </a:r>
           </a:p>
         </p:txBody>
@@ -16145,7 +16145,7 @@
           <a:p>
             <a:r>
               <a:rPr lang="en-GB" sz="4000" dirty="0"/>
-              <a:t>0.443</a:t>
+              <a:t>0,443</a:t>
             </a:r>
           </a:p>
         </p:txBody>
@@ -16236,7 +16236,7 @@
           <a:p>
             <a:r>
               <a:rPr lang="en-GB" sz="4000" dirty="0"/>
-              <a:t>0.403</a:t>
+              <a:t>0,403</a:t>
             </a:r>
           </a:p>
         </p:txBody>
@@ -16327,7 +16327,7 @@
           <a:p>
             <a:r>
               <a:rPr lang="en-GB" sz="4000" dirty="0"/>
-              <a:t>0.46</a:t>
+              <a:t>0,46</a:t>
             </a:r>
           </a:p>
         </p:txBody>
@@ -16418,7 +16418,7 @@
           <a:p>
             <a:r>
               <a:rPr lang="en-GB" sz="4000" dirty="0"/>
-              <a:t>0.426</a:t>
+              <a:t>0,426</a:t>
             </a:r>
           </a:p>
         </p:txBody>
@@ -16509,7 +16509,7 @@
           <a:p>
             <a:r>
               <a:rPr lang="en-GB" sz="4000" dirty="0"/>
-              <a:t>0.404</a:t>
+              <a:t>0,404</a:t>
             </a:r>
           </a:p>
         </p:txBody>
@@ -17272,7 +17272,7 @@
           <a:p>
             <a:r>
               <a:rPr lang="en-GB" sz="4000" dirty="0"/>
-              <a:t>0.4</a:t>
+              <a:t>0,4</a:t>
             </a:r>
           </a:p>
         </p:txBody>

--- a/media/resources/files/Onduktar_Kaytalanuuchu_iReettoo-KartaSortto_Gid1vZ5.pptx
+++ b/media/resources/files/Onduktar_Kaytalanuuchu_iReettoo-KartaSortto_Gid1vZ5.pptx
@@ -7239,7 +7239,7 @@
           <a:p>
             <a:r>
               <a:rPr lang="en-GB" sz="4000" dirty="0"/>
-              <a:t>0,462</a:t>
+              <a:t>0,462 462</a:t>
             </a:r>
             <a:r>
               <a:rPr lang="ky-KG" sz="4000" dirty="0">
@@ -7247,7 +7247,7 @@
                   <a:srgbClr val="FF0000"/>
                 </a:solidFill>
               </a:rPr>
-              <a:t>462</a:t>
+              <a:t/>
             </a:r>
             <a:endParaRPr lang="en-GB" sz="4000" dirty="0">
               <a:solidFill>
@@ -7759,7 +7759,7 @@
           <a:p>
             <a:r>
               <a:rPr lang="en-GB" sz="4000" dirty="0"/>
-              <a:t>0,488</a:t>
+              <a:t>0,488 488</a:t>
             </a:r>
             <a:r>
               <a:rPr lang="ky-KG" sz="4000" dirty="0">
@@ -7767,7 +7767,7 @@
                   <a:srgbClr val="FF0000"/>
                 </a:solidFill>
               </a:rPr>
-              <a:t>488</a:t>
+              <a:t/>
             </a:r>
             <a:endParaRPr lang="en-GB" sz="4000" dirty="0">
               <a:solidFill>
@@ -7863,7 +7863,7 @@
           <a:p>
             <a:r>
               <a:rPr lang="en-GB" sz="4000" dirty="0"/>
-              <a:t>0,434</a:t>
+              <a:t>0,434 434</a:t>
             </a:r>
             <a:r>
               <a:rPr lang="ky-KG" sz="4000" dirty="0">
@@ -7871,7 +7871,7 @@
                   <a:srgbClr val="FF0000"/>
                 </a:solidFill>
               </a:rPr>
-              <a:t>434</a:t>
+              <a:t/>
             </a:r>
             <a:endParaRPr lang="en-GB" sz="4000" dirty="0">
               <a:solidFill>
@@ -7967,7 +7967,7 @@
           <a:p>
             <a:r>
               <a:rPr lang="en-GB" sz="4000" dirty="0"/>
-              <a:t>0,433</a:t>
+              <a:t>0,433 433</a:t>
             </a:r>
             <a:r>
               <a:rPr lang="ky-KG" sz="4000" dirty="0">
@@ -7975,7 +7975,7 @@
                   <a:srgbClr val="FF0000"/>
                 </a:solidFill>
               </a:rPr>
-              <a:t>433</a:t>
+              <a:t/>
             </a:r>
             <a:endParaRPr lang="en-GB" sz="4000" dirty="0">
               <a:solidFill>
@@ -8175,7 +8175,7 @@
           <a:p>
             <a:r>
               <a:rPr lang="en-GB" sz="4000" dirty="0"/>
-              <a:t>0,443</a:t>
+              <a:t>0,443 443</a:t>
             </a:r>
             <a:r>
               <a:rPr lang="ky-KG" sz="4000" dirty="0">
@@ -8183,7 +8183,7 @@
                   <a:srgbClr val="FF0000"/>
                 </a:solidFill>
               </a:rPr>
-              <a:t>443</a:t>
+              <a:t/>
             </a:r>
             <a:endParaRPr lang="en-GB" sz="4000" dirty="0">
               <a:solidFill>
@@ -8279,7 +8279,7 @@
           <a:p>
             <a:r>
               <a:rPr lang="en-GB" sz="4000" dirty="0"/>
-              <a:t>0,403</a:t>
+              <a:t>0,403 403</a:t>
             </a:r>
             <a:r>
               <a:rPr lang="ky-KG" sz="4000" dirty="0">
@@ -8287,7 +8287,7 @@
                   <a:srgbClr val="FF0000"/>
                 </a:solidFill>
               </a:rPr>
-              <a:t>403</a:t>
+              <a:t/>
             </a:r>
             <a:endParaRPr lang="en-GB" sz="4000" dirty="0">
               <a:solidFill>
@@ -8487,7 +8487,7 @@
           <a:p>
             <a:r>
               <a:rPr lang="en-GB" sz="4000" dirty="0"/>
-              <a:t>0,426</a:t>
+              <a:t>0,426 426</a:t>
             </a:r>
             <a:r>
               <a:rPr lang="ky-KG" sz="4000" dirty="0">
@@ -8495,7 +8495,7 @@
                   <a:srgbClr val="FF0000"/>
                 </a:solidFill>
               </a:rPr>
-              <a:t>426</a:t>
+              <a:t/>
             </a:r>
             <a:endParaRPr lang="en-GB" sz="4000" dirty="0">
               <a:solidFill>
@@ -8591,7 +8591,7 @@
           <a:p>
             <a:r>
               <a:rPr lang="en-GB" sz="4000" dirty="0"/>
-              <a:t>0,404</a:t>
+              <a:t>0,404 404</a:t>
             </a:r>
             <a:r>
               <a:rPr lang="ky-KG" sz="4000" dirty="0">
@@ -8599,7 +8599,7 @@
                   <a:srgbClr val="FF0000"/>
                 </a:solidFill>
               </a:rPr>
-              <a:t>404</a:t>
+              <a:t/>
             </a:r>
             <a:endParaRPr lang="en-GB" sz="4000" dirty="0">
               <a:solidFill>
@@ -10155,7 +10155,7 @@
           <a:p>
             <a:r>
               <a:rPr lang="en-GB" sz="4000" dirty="0"/>
-              <a:t>0,462</a:t>
+              <a:t>0,462 462</a:t>
             </a:r>
             <a:r>
               <a:rPr lang="en-GB" sz="4000" dirty="0">
@@ -10163,7 +10163,7 @@
                   <a:srgbClr val="FF0000"/>
                 </a:solidFill>
               </a:rPr>
-              <a:t>462</a:t>
+              <a:t/>
             </a:r>
             <a:endParaRPr lang="en-GB" sz="4000" dirty="0"/>
           </a:p>
@@ -10454,7 +10454,7 @@
           <a:p>
             <a:r>
               <a:rPr lang="en-GB" sz="4000" dirty="0"/>
-              <a:t>0,488</a:t>
+              <a:t>0,488 488</a:t>
             </a:r>
             <a:r>
               <a:rPr lang="en-GB" sz="4000" dirty="0">
@@ -10462,7 +10462,7 @@
                   <a:srgbClr val="FF0000"/>
                 </a:solidFill>
               </a:rPr>
-              <a:t>488</a:t>
+              <a:t/>
             </a:r>
             <a:endParaRPr lang="en-GB" sz="4000" dirty="0"/>
           </a:p>
@@ -10554,7 +10554,7 @@
           <a:p>
             <a:r>
               <a:rPr lang="en-GB" sz="4000" dirty="0"/>
-              <a:t>0,433</a:t>
+              <a:t>0,433 433</a:t>
             </a:r>
             <a:r>
               <a:rPr lang="en-GB" sz="4000" dirty="0">
@@ -10562,7 +10562,7 @@
                   <a:srgbClr val="FF0000"/>
                 </a:solidFill>
               </a:rPr>
-              <a:t>433</a:t>
+              <a:t/>
             </a:r>
             <a:endParaRPr lang="en-GB" sz="4000" dirty="0"/>
           </a:p>
@@ -10654,7 +10654,7 @@
           <a:p>
             <a:r>
               <a:rPr lang="en-GB" sz="4000" dirty="0"/>
-              <a:t>0,404</a:t>
+              <a:t>0,404 404</a:t>
             </a:r>
             <a:r>
               <a:rPr lang="en-GB" sz="4000" dirty="0">
@@ -10662,7 +10662,7 @@
                   <a:srgbClr val="FF0000"/>
                 </a:solidFill>
               </a:rPr>
-              <a:t>404</a:t>
+              <a:t/>
             </a:r>
             <a:endParaRPr lang="en-GB" sz="4000" dirty="0"/>
           </a:p>
